--- a/Proyecto integrador/Pruebas de simulación/Actividad 5.1 Pruebas de simulación_RobertoCahuare_SIM_5ISCM.pptx
+++ b/Proyecto integrador/Pruebas de simulación/Actividad 5.1 Pruebas de simulación_RobertoCahuare_SIM_5ISCM.pptx
@@ -3772,19 +3772,7 @@
                 <a:cs typeface="Open Sans Bold"/>
                 <a:sym typeface="Open Sans Bold"/>
               </a:rPr>
-              <a:t>                                                                                                  </a:t>
-            </a:r>
-            <a:r>
-              <a:rPr lang="en-US" sz="1400" b="1" dirty="0">
-                <a:solidFill>
-                  <a:srgbClr val="000000"/>
-                </a:solidFill>
-                <a:latin typeface="Open Sans Bold"/>
-                <a:ea typeface="Open Sans Bold"/>
-                <a:cs typeface="Open Sans Bold"/>
-                <a:sym typeface="Open Sans Bold"/>
-              </a:rPr>
-              <a:t>4</a:t>
+              <a:t>                                                                                                  4</a:t>
             </a:r>
             <a:r>
               <a:rPr lang="en-US" sz="1400" b="1" dirty="0" smtClean="0">
@@ -3796,19 +3784,7 @@
                 <a:cs typeface="Open Sans Bold"/>
                 <a:sym typeface="Open Sans Bold"/>
               </a:rPr>
-              <a:t> </a:t>
-            </a:r>
-            <a:r>
-              <a:rPr lang="en-US" sz="1400" b="1" dirty="0" smtClean="0">
-                <a:solidFill>
-                  <a:srgbClr val="000000"/>
-                </a:solidFill>
-                <a:latin typeface="Open Sans Bold"/>
-                <a:ea typeface="Open Sans Bold"/>
-                <a:cs typeface="Open Sans Bold"/>
-                <a:sym typeface="Open Sans Bold"/>
-              </a:rPr>
-              <a:t>DE OCTUBRE </a:t>
+              <a:t> DE OCTUBRE </a:t>
             </a:r>
             <a:r>
               <a:rPr lang="en-US" sz="1400" b="1" dirty="0">
@@ -4663,7 +4639,21 @@
                 <a:latin typeface="Arial" panose="020B0604020202020204" pitchFamily="34" charset="0"/>
                 <a:cs typeface="Arial" panose="020B0604020202020204" pitchFamily="34" charset="0"/>
               </a:rPr>
-              <a:t>FUENTES DE CONSULTA</a:t>
+              <a:t>FUENTES </a:t>
+            </a:r>
+            <a:r>
+              <a:rPr lang="es-MX" sz="2800" b="1" smtClean="0">
+                <a:latin typeface="Arial" panose="020B0604020202020204" pitchFamily="34" charset="0"/>
+                <a:cs typeface="Arial" panose="020B0604020202020204" pitchFamily="34" charset="0"/>
+              </a:rPr>
+              <a:t>DE </a:t>
+            </a:r>
+            <a:r>
+              <a:rPr lang="es-MX" sz="2800" b="1" smtClean="0">
+                <a:latin typeface="Arial" panose="020B0604020202020204" pitchFamily="34" charset="0"/>
+                <a:cs typeface="Arial" panose="020B0604020202020204" pitchFamily="34" charset="0"/>
+              </a:rPr>
+              <a:t>INFORMACIÓN</a:t>
             </a:r>
             <a:endParaRPr lang="es-MX" sz="2800" b="1" dirty="0">
               <a:latin typeface="Arial" panose="020B0604020202020204" pitchFamily="34" charset="0"/>
